--- a/classes/parte-14-grc-riesgo-y-cumplimiento/281-cumplimiento-gdpr-hipaa-y-pci-dss/clase-281-presentacion.pptx
+++ b/classes/parte-14-grc-riesgo-y-cumplimiento/281-cumplimiento-gdpr-hipaa-y-pci-dss/clase-281-presentacion.pptx
@@ -17,6 +17,10 @@
     <p:sldId id="265" r:id="rId16"/>
     <p:sldId id="266" r:id="rId17"/>
     <p:sldId id="267" r:id="rId18"/>
+    <p:sldId id="268" r:id="rId19"/>
+    <p:sldId id="269" r:id="rId20"/>
+    <p:sldId id="270" r:id="rId21"/>
+    <p:sldId id="271" r:id="rId22"/>
   </p:sldIdLst>
   <p:sldSz cx="9144000" cy="6858000" type="screen4x3"/>
   <p:notesSz cx="6858000" cy="9144000"/>
@@ -3198,7 +3202,7 @@
                   <a:srgbClr val="0B3D2E"/>
                 </a:solidFill>
               </a:rPr>
-              <a:t>⚠️ Errores comunes</a:t>
+              <a:t>🧪 Laboratorio guiado (ejercicio aplicado)</a:t>
             </a:r>
           </a:p>
         </p:txBody>
@@ -3236,67 +3240,97 @@
                   <a:srgbClr val="22282E"/>
                 </a:solidFill>
               </a:rPr>
-              <a:t>•  Almacenar el PAN sin necesidad — Amplía el alcance PCI; tokeniza o usa hosted fields</a:t>
-            </a:r>
-          </a:p>
-          <a:p>
-            <a:pPr>
-              <a:spcAft>
-                <a:spcPts val="600"/>
-              </a:spcAft>
-            </a:pPr>
-            <a:r>
-              <a:rPr sz="1500">
-                <a:solidFill>
-                  <a:srgbClr val="22282E"/>
-                </a:solidFill>
-              </a:rPr>
-              <a:t>•  Creer que GDPR no aplica por estar fuera de la UE — Aplica si tratas datos de residentes UE; revisa Art.3</a:t>
-            </a:r>
-          </a:p>
-          <a:p>
-            <a:pPr>
-              <a:spcAft>
-                <a:spcPts val="600"/>
-              </a:spcAft>
-            </a:pPr>
-            <a:r>
-              <a:rPr sz="1500">
-                <a:solidFill>
-                  <a:srgbClr val="22282E"/>
-                </a:solidFill>
-              </a:rPr>
-              <a:t>•  Confundir cumplimiento con seguridad — Cumplir no garantiza estar seguro; es un mínimo</a:t>
-            </a:r>
-          </a:p>
-          <a:p>
-            <a:pPr>
-              <a:spcAft>
-                <a:spcPts val="600"/>
-              </a:spcAft>
-            </a:pPr>
-            <a:r>
-              <a:rPr sz="1500">
-                <a:solidFill>
-                  <a:srgbClr val="22282E"/>
-                </a:solidFill>
-              </a:rPr>
-              <a:t>•  No tener DPA con proveedores — GDPR lo exige entre responsable y encargado; fírmalo</a:t>
-            </a:r>
-          </a:p>
-          <a:p>
-            <a:pPr>
-              <a:spcAft>
-                <a:spcPts val="600"/>
-              </a:spcAft>
-            </a:pPr>
-            <a:r>
-              <a:rPr sz="1500">
-                <a:solidFill>
-                  <a:srgbClr val="22282E"/>
-                </a:solidFill>
-              </a:rPr>
-              <a:t>•  Notificar tarde una brecha — GDPR exige 72 h; ten el procedimiento listo antes del incidente</a:t>
+              <a:t>•  Escenario: "Ferretería del Sur S.A." vende online a clientes de la UE, guarda perfiles de clientes y procesa pagos con tarjeta a través de una pasarela.</a:t>
+            </a:r>
+          </a:p>
+          <a:p>
+            <a:pPr>
+              <a:spcAft>
+                <a:spcPts val="600"/>
+              </a:spcAft>
+            </a:pPr>
+            <a:r>
+              <a:rPr sz="1500">
+                <a:solidFill>
+                  <a:srgbClr val="22282E"/>
+                </a:solidFill>
+              </a:rPr>
+              <a:t>•  Data flow mapping: dibuja el flujo de datos personales y de tarjeta desde el navegador del cliente hasta la base de datos y la pasarela. Marca dónde se almacena cada tipo.</a:t>
+            </a:r>
+          </a:p>
+          <a:p>
+            <a:pPr>
+              <a:spcAft>
+                <a:spcPts val="600"/>
+              </a:spcAft>
+            </a:pPr>
+            <a:r>
+              <a:rPr sz="1500">
+                <a:solidFill>
+                  <a:srgbClr val="22282E"/>
+                </a:solidFill>
+              </a:rPr>
+              <a:t>•  Aplicabilidad: en una tabla, decide qué regulación aplica a cada flujo. GDPR aplica (clientes UE); PCI-DSS aplica (datos de tarjeta); HIPAA no (no hay datos de salud). Justifica.</a:t>
+            </a:r>
+          </a:p>
+          <a:p>
+            <a:pPr>
+              <a:spcAft>
+                <a:spcPts val="600"/>
+              </a:spcAft>
+            </a:pPr>
+            <a:r>
+              <a:rPr sz="1500">
+                <a:solidFill>
+                  <a:srgbClr val="22282E"/>
+                </a:solidFill>
+              </a:rPr>
+              <a:t>•  GDPR: identifica la base de licitud de cada tratamiento (ejecución de contrato para la compra, consentimiento para marketing) y lista 3 derechos que debes poder atender (acceso, supresión…</a:t>
+            </a:r>
+          </a:p>
+          <a:p>
+            <a:pPr>
+              <a:spcAft>
+                <a:spcPts val="600"/>
+              </a:spcAft>
+            </a:pPr>
+            <a:r>
+              <a:rPr sz="1500">
+                <a:solidFill>
+                  <a:srgbClr val="22282E"/>
+                </a:solidFill>
+              </a:rPr>
+              <a:t>•  Reducción de alcance PCI: propón usar la pasarela con hosted fields o tokenización para que el PAN nunca toque tus servidores; explica cómo eso reduce el SAQ aplicable (de D a A).</a:t>
+            </a:r>
+          </a:p>
+          <a:p>
+            <a:pPr>
+              <a:spcAft>
+                <a:spcPts val="600"/>
+              </a:spcAft>
+            </a:pPr>
+            <a:r>
+              <a:rPr sz="1500">
+                <a:solidFill>
+                  <a:srgbClr val="22282E"/>
+                </a:solidFill>
+              </a:rPr>
+              <a:t>•  Mapeo a controles: crea una tabla requisito → control técnico, p. ej.: PCI Req.3 (proteger datos almacenados) → cifrado + tokenización; PCI Req.8 (identificar y autenticar) → MFA; GDPR Art.32 →…</a:t>
+            </a:r>
+          </a:p>
+          <a:p>
+            <a:pPr>
+              <a:spcAft>
+                <a:spcPts val="600"/>
+              </a:spcAft>
+            </a:pPr>
+            <a:r>
+              <a:rPr sz="1500">
+                <a:solidFill>
+                  <a:srgbClr val="22282E"/>
+                </a:solidFill>
+              </a:rPr>
+              <a:t>•  Notificación de brechas: redacta el procedimiento con plazos: GDPR 72 h a la autoridad de control; PCI, notificación inmediata al adquirente; documenta a quién avisa cada uno.</a:t>
             </a:r>
           </a:p>
         </p:txBody>
@@ -3347,7 +3381,7 @@
                   <a:srgbClr val="0B3D2E"/>
                 </a:solidFill>
               </a:rPr>
-              <a:t>❓ Preguntas frecuentes</a:t>
+              <a:t>✍️ Ejercicios</a:t>
             </a:r>
           </a:p>
         </p:txBody>
@@ -3385,97 +3419,82 @@
                   <a:srgbClr val="22282E"/>
                 </a:solidFill>
               </a:rPr>
-              <a:t>•  ❓ ¿Cumplir PCI-DSS me hace cumplir GDPR?</a:t>
-            </a:r>
-          </a:p>
-          <a:p>
-            <a:pPr>
-              <a:spcAft>
-                <a:spcPts val="600"/>
-              </a:spcAft>
-            </a:pPr>
-            <a:r>
-              <a:rPr sz="1500">
-                <a:solidFill>
-                  <a:srgbClr val="22282E"/>
-                </a:solidFill>
-              </a:rPr>
-              <a:t>•  No. Se solapan en algunos controles (cifrado, acceso), pero protegen cosas distintas: PCI los datos de tarjeta, GDPR los datos personales en general.</a:t>
-            </a:r>
-          </a:p>
-          <a:p>
-            <a:pPr>
-              <a:spcAft>
-                <a:spcPts val="600"/>
-              </a:spcAft>
-            </a:pPr>
-            <a:r>
-              <a:rPr sz="1500">
-                <a:solidFill>
-                  <a:srgbClr val="22282E"/>
-                </a:solidFill>
-              </a:rPr>
-              <a:t>•  ❓ ¿PCI-DSS es una ley?</a:t>
-            </a:r>
-          </a:p>
-          <a:p>
-            <a:pPr>
-              <a:spcAft>
-                <a:spcPts val="600"/>
-              </a:spcAft>
-            </a:pPr>
-            <a:r>
-              <a:rPr sz="1500">
-                <a:solidFill>
-                  <a:srgbClr val="22282E"/>
-                </a:solidFill>
-              </a:rPr>
-              <a:t>•  No, es un estándar contractual impuesto por las marcas de tarjeta (Visa, Mastercard, etc.). Su incumplimiento acarrea multas y pérdida de la capacidad de procesar pagos.</a:t>
-            </a:r>
-          </a:p>
-          <a:p>
-            <a:pPr>
-              <a:spcAft>
-                <a:spcPts val="600"/>
-              </a:spcAft>
-            </a:pPr>
-            <a:r>
-              <a:rPr sz="1500">
-                <a:solidFill>
-                  <a:srgbClr val="22282E"/>
-                </a:solidFill>
-              </a:rPr>
-              <a:t>•  ❓ ¿Qué cambió en PCI DSS v4.0?</a:t>
-            </a:r>
-          </a:p>
-          <a:p>
-            <a:pPr>
-              <a:spcAft>
-                <a:spcPts val="600"/>
-              </a:spcAft>
-            </a:pPr>
-            <a:r>
-              <a:rPr sz="1500">
-                <a:solidFill>
-                  <a:srgbClr val="22282E"/>
-                </a:solidFill>
-              </a:rPr>
-              <a:t>•  Más flexibilidad (enfoque personalizado), MFA reforzado, requisitos de anti-phishing y controles adicionales que entraron plenamente en vigor en 2025.</a:t>
-            </a:r>
-          </a:p>
-          <a:p>
-            <a:pPr>
-              <a:spcAft>
-                <a:spcPts val="600"/>
-              </a:spcAft>
-            </a:pPr>
-            <a:r>
-              <a:rPr sz="1500">
-                <a:solidFill>
-                  <a:srgbClr val="22282E"/>
-                </a:solidFill>
-              </a:rPr>
-              <a:t>•  ❓ ¿HIPAA me afecta si no estoy en EE. UU.?</a:t>
+              <a:t>•  Clasifica: ¿aplica GDPR a una empresa de EE. UU. que vende a clientes en España? Justifica.</a:t>
+            </a:r>
+          </a:p>
+          <a:p>
+            <a:pPr>
+              <a:spcAft>
+                <a:spcPts val="600"/>
+              </a:spcAft>
+            </a:pPr>
+            <a:r>
+              <a:rPr sz="1500">
+                <a:solidFill>
+                  <a:srgbClr val="22282E"/>
+                </a:solidFill>
+              </a:rPr>
+              <a:t>•  Diferencia responsable y encargado con un ejemplo del escenario.</a:t>
+            </a:r>
+          </a:p>
+          <a:p>
+            <a:pPr>
+              <a:spcAft>
+                <a:spcPts val="600"/>
+              </a:spcAft>
+            </a:pPr>
+            <a:r>
+              <a:rPr sz="1500">
+                <a:solidFill>
+                  <a:srgbClr val="22282E"/>
+                </a:solidFill>
+              </a:rPr>
+              <a:t>•  ¿Qué SAQ aplica si tercerizas todo el pago con hosted fields? ¿Y si almacenas el PAN?</a:t>
+            </a:r>
+          </a:p>
+          <a:p>
+            <a:pPr>
+              <a:spcAft>
+                <a:spcPts val="600"/>
+              </a:spcAft>
+            </a:pPr>
+            <a:r>
+              <a:rPr sz="1500">
+                <a:solidFill>
+                  <a:srgbClr val="22282E"/>
+                </a:solidFill>
+              </a:rPr>
+              <a:t>•  Enumera las tres categorías de salvaguardas de la HIPAA Security Rule.</a:t>
+            </a:r>
+          </a:p>
+          <a:p>
+            <a:pPr>
+              <a:spcAft>
+                <a:spcPts val="600"/>
+              </a:spcAft>
+            </a:pPr>
+            <a:r>
+              <a:rPr sz="1500">
+                <a:solidFill>
+                  <a:srgbClr val="22282E"/>
+                </a:solidFill>
+              </a:rPr>
+              <a:t>•  Un cliente pide borrar sus datos, pero tienes obligación fiscal de conservar facturas 6 años. ¿Cómo lo resuelves?</a:t>
+            </a:r>
+          </a:p>
+          <a:p>
+            <a:pPr>
+              <a:spcAft>
+                <a:spcPts val="600"/>
+              </a:spcAft>
+            </a:pPr>
+            <a:r>
+              <a:rPr sz="1500">
+                <a:solidFill>
+                  <a:srgbClr val="22282E"/>
+                </a:solidFill>
+              </a:rPr>
+              <a:t>•  Mapea el requisito PCI de segmentación de red a un control técnico concreto.</a:t>
             </a:r>
           </a:p>
         </p:txBody>
@@ -3526,7 +3545,7 @@
                   <a:srgbClr val="0B3D2E"/>
                 </a:solidFill>
               </a:rPr>
-              <a:t>🔗 Referencias</a:t>
+              <a:t>📝 Reto verificable</a:t>
             </a:r>
           </a:p>
         </p:txBody>
@@ -3564,6 +3583,438 @@
                   <a:srgbClr val="22282E"/>
                 </a:solidFill>
               </a:rPr>
+              <a:t>•  Entrega un análisis de aplicabilidad regulatoria del escenario con: mapa de flujo de datos, tabla de qué regulación aplica y por qué, mapeo de al menos 8 requisitos a controles técnicos, y el…</a:t>
+            </a:r>
+          </a:p>
+          <a:p>
+            <a:pPr>
+              <a:spcAft>
+                <a:spcPts val="600"/>
+              </a:spcAft>
+            </a:pPr>
+            <a:r>
+              <a:rPr sz="1500">
+                <a:solidFill>
+                  <a:srgbClr val="22282E"/>
+                </a:solidFill>
+              </a:rPr>
+              <a:t>•  Criterio de aceptación: cada regulación se declara aplicable o no con justificación, el mapeo requisito→control es verificable, y los plazos de notificación (72 h GDPR incluido) son correctos.</a:t>
+            </a:r>
+          </a:p>
+        </p:txBody>
+      </p:sp>
+    </p:spTree>
+  </p:cSld>
+  <p:clrMapOvr>
+    <a:masterClrMapping/>
+  </p:clrMapOvr>
+</p:sld>
+</file>
+
+<file path=ppt/slides/slide13.xml><?xml version="1.0" encoding="utf-8"?>
+<p:sld xmlns:a="http://schemas.openxmlformats.org/drawingml/2006/main" xmlns:p="http://schemas.openxmlformats.org/presentationml/2006/main" xmlns:r="http://schemas.openxmlformats.org/officeDocument/2006/relationships">
+  <p:cSld>
+    <p:spTree>
+      <p:nvGrpSpPr>
+        <p:cNvPr id="1" name=""/>
+        <p:cNvGrpSpPr/>
+        <p:nvPr/>
+      </p:nvGrpSpPr>
+      <p:grpSpPr/>
+      <p:sp>
+        <p:nvSpPr>
+          <p:cNvPr id="2" name="TextBox 1"/>
+          <p:cNvSpPr txBox="1"/>
+          <p:nvPr/>
+        </p:nvSpPr>
+        <p:spPr>
+          <a:xfrm>
+            <a:off x="457200" y="320040"/>
+            <a:ext cx="8229600" cy="822960"/>
+          </a:xfrm>
+          <a:prstGeom prst="rect">
+            <a:avLst/>
+          </a:prstGeom>
+          <a:noFill/>
+        </p:spPr>
+        <p:txBody>
+          <a:bodyPr wrap="square">
+            <a:spAutoFit/>
+          </a:bodyPr>
+          <a:lstStyle/>
+          <a:p>
+            <a:r>
+              <a:rPr sz="2600" b="1">
+                <a:solidFill>
+                  <a:srgbClr val="0B3D2E"/>
+                </a:solidFill>
+              </a:rPr>
+              <a:t>⚠️ Errores comunes</a:t>
+            </a:r>
+          </a:p>
+        </p:txBody>
+      </p:sp>
+      <p:sp>
+        <p:nvSpPr>
+          <p:cNvPr id="3" name="TextBox 2"/>
+          <p:cNvSpPr txBox="1"/>
+          <p:nvPr/>
+        </p:nvSpPr>
+        <p:spPr>
+          <a:xfrm>
+            <a:off x="457200" y="1280160"/>
+            <a:ext cx="8229600" cy="4937760"/>
+          </a:xfrm>
+          <a:prstGeom prst="rect">
+            <a:avLst/>
+          </a:prstGeom>
+          <a:noFill/>
+        </p:spPr>
+        <p:txBody>
+          <a:bodyPr wrap="square">
+            <a:spAutoFit/>
+          </a:bodyPr>
+          <a:lstStyle/>
+          <a:p>
+            <a:pPr>
+              <a:spcAft>
+                <a:spcPts val="600"/>
+              </a:spcAft>
+            </a:pPr>
+            <a:r>
+              <a:rPr sz="1500">
+                <a:solidFill>
+                  <a:srgbClr val="22282E"/>
+                </a:solidFill>
+              </a:rPr>
+              <a:t>•  Almacenar el PAN sin necesidad — Amplía el alcance PCI; tokeniza o usa hosted fields</a:t>
+            </a:r>
+          </a:p>
+          <a:p>
+            <a:pPr>
+              <a:spcAft>
+                <a:spcPts val="600"/>
+              </a:spcAft>
+            </a:pPr>
+            <a:r>
+              <a:rPr sz="1500">
+                <a:solidFill>
+                  <a:srgbClr val="22282E"/>
+                </a:solidFill>
+              </a:rPr>
+              <a:t>•  Creer que GDPR no aplica por estar fuera de la UE — Aplica si tratas datos de residentes UE; revisa Art.3</a:t>
+            </a:r>
+          </a:p>
+          <a:p>
+            <a:pPr>
+              <a:spcAft>
+                <a:spcPts val="600"/>
+              </a:spcAft>
+            </a:pPr>
+            <a:r>
+              <a:rPr sz="1500">
+                <a:solidFill>
+                  <a:srgbClr val="22282E"/>
+                </a:solidFill>
+              </a:rPr>
+              <a:t>•  Confundir cumplimiento con seguridad — Cumplir no garantiza estar seguro; es un mínimo</a:t>
+            </a:r>
+          </a:p>
+          <a:p>
+            <a:pPr>
+              <a:spcAft>
+                <a:spcPts val="600"/>
+              </a:spcAft>
+            </a:pPr>
+            <a:r>
+              <a:rPr sz="1500">
+                <a:solidFill>
+                  <a:srgbClr val="22282E"/>
+                </a:solidFill>
+              </a:rPr>
+              <a:t>•  No tener DPA con proveedores — GDPR lo exige entre responsable y encargado; fírmalo</a:t>
+            </a:r>
+          </a:p>
+          <a:p>
+            <a:pPr>
+              <a:spcAft>
+                <a:spcPts val="600"/>
+              </a:spcAft>
+            </a:pPr>
+            <a:r>
+              <a:rPr sz="1500">
+                <a:solidFill>
+                  <a:srgbClr val="22282E"/>
+                </a:solidFill>
+              </a:rPr>
+              <a:t>•  Notificar tarde una brecha — GDPR exige 72 h; ten el procedimiento listo antes del incidente</a:t>
+            </a:r>
+          </a:p>
+        </p:txBody>
+      </p:sp>
+    </p:spTree>
+  </p:cSld>
+  <p:clrMapOvr>
+    <a:masterClrMapping/>
+  </p:clrMapOvr>
+</p:sld>
+</file>
+
+<file path=ppt/slides/slide14.xml><?xml version="1.0" encoding="utf-8"?>
+<p:sld xmlns:a="http://schemas.openxmlformats.org/drawingml/2006/main" xmlns:p="http://schemas.openxmlformats.org/presentationml/2006/main" xmlns:r="http://schemas.openxmlformats.org/officeDocument/2006/relationships">
+  <p:cSld>
+    <p:spTree>
+      <p:nvGrpSpPr>
+        <p:cNvPr id="1" name=""/>
+        <p:cNvGrpSpPr/>
+        <p:nvPr/>
+      </p:nvGrpSpPr>
+      <p:grpSpPr/>
+      <p:sp>
+        <p:nvSpPr>
+          <p:cNvPr id="2" name="TextBox 1"/>
+          <p:cNvSpPr txBox="1"/>
+          <p:nvPr/>
+        </p:nvSpPr>
+        <p:spPr>
+          <a:xfrm>
+            <a:off x="457200" y="320040"/>
+            <a:ext cx="8229600" cy="822960"/>
+          </a:xfrm>
+          <a:prstGeom prst="rect">
+            <a:avLst/>
+          </a:prstGeom>
+          <a:noFill/>
+        </p:spPr>
+        <p:txBody>
+          <a:bodyPr wrap="square">
+            <a:spAutoFit/>
+          </a:bodyPr>
+          <a:lstStyle/>
+          <a:p>
+            <a:r>
+              <a:rPr sz="2600" b="1">
+                <a:solidFill>
+                  <a:srgbClr val="0B3D2E"/>
+                </a:solidFill>
+              </a:rPr>
+              <a:t>❓ Preguntas frecuentes</a:t>
+            </a:r>
+          </a:p>
+        </p:txBody>
+      </p:sp>
+      <p:sp>
+        <p:nvSpPr>
+          <p:cNvPr id="3" name="TextBox 2"/>
+          <p:cNvSpPr txBox="1"/>
+          <p:nvPr/>
+        </p:nvSpPr>
+        <p:spPr>
+          <a:xfrm>
+            <a:off x="457200" y="1280160"/>
+            <a:ext cx="8229600" cy="4937760"/>
+          </a:xfrm>
+          <a:prstGeom prst="rect">
+            <a:avLst/>
+          </a:prstGeom>
+          <a:noFill/>
+        </p:spPr>
+        <p:txBody>
+          <a:bodyPr wrap="square">
+            <a:spAutoFit/>
+          </a:bodyPr>
+          <a:lstStyle/>
+          <a:p>
+            <a:pPr>
+              <a:spcAft>
+                <a:spcPts val="600"/>
+              </a:spcAft>
+            </a:pPr>
+            <a:r>
+              <a:rPr sz="1500">
+                <a:solidFill>
+                  <a:srgbClr val="22282E"/>
+                </a:solidFill>
+              </a:rPr>
+              <a:t>•  ❓ ¿Cumplir PCI-DSS me hace cumplir GDPR?</a:t>
+            </a:r>
+          </a:p>
+          <a:p>
+            <a:pPr>
+              <a:spcAft>
+                <a:spcPts val="600"/>
+              </a:spcAft>
+            </a:pPr>
+            <a:r>
+              <a:rPr sz="1500">
+                <a:solidFill>
+                  <a:srgbClr val="22282E"/>
+                </a:solidFill>
+              </a:rPr>
+              <a:t>•  No. Se solapan en algunos controles (cifrado, acceso), pero protegen cosas distintas: PCI los datos de tarjeta, GDPR los datos personales en general.</a:t>
+            </a:r>
+          </a:p>
+          <a:p>
+            <a:pPr>
+              <a:spcAft>
+                <a:spcPts val="600"/>
+              </a:spcAft>
+            </a:pPr>
+            <a:r>
+              <a:rPr sz="1500">
+                <a:solidFill>
+                  <a:srgbClr val="22282E"/>
+                </a:solidFill>
+              </a:rPr>
+              <a:t>•  ❓ ¿PCI-DSS es una ley?</a:t>
+            </a:r>
+          </a:p>
+          <a:p>
+            <a:pPr>
+              <a:spcAft>
+                <a:spcPts val="600"/>
+              </a:spcAft>
+            </a:pPr>
+            <a:r>
+              <a:rPr sz="1500">
+                <a:solidFill>
+                  <a:srgbClr val="22282E"/>
+                </a:solidFill>
+              </a:rPr>
+              <a:t>•  No, es un estándar contractual impuesto por las marcas de tarjeta (Visa, Mastercard, etc.). Su incumplimiento acarrea multas y pérdida de la capacidad de procesar pagos.</a:t>
+            </a:r>
+          </a:p>
+          <a:p>
+            <a:pPr>
+              <a:spcAft>
+                <a:spcPts val="600"/>
+              </a:spcAft>
+            </a:pPr>
+            <a:r>
+              <a:rPr sz="1500">
+                <a:solidFill>
+                  <a:srgbClr val="22282E"/>
+                </a:solidFill>
+              </a:rPr>
+              <a:t>•  ❓ ¿Qué cambió en PCI DSS v4.0?</a:t>
+            </a:r>
+          </a:p>
+          <a:p>
+            <a:pPr>
+              <a:spcAft>
+                <a:spcPts val="600"/>
+              </a:spcAft>
+            </a:pPr>
+            <a:r>
+              <a:rPr sz="1500">
+                <a:solidFill>
+                  <a:srgbClr val="22282E"/>
+                </a:solidFill>
+              </a:rPr>
+              <a:t>•  Más flexibilidad (enfoque personalizado), MFA reforzado, requisitos de anti-phishing y controles adicionales que entraron plenamente en vigor en 2025.</a:t>
+            </a:r>
+          </a:p>
+          <a:p>
+            <a:pPr>
+              <a:spcAft>
+                <a:spcPts val="600"/>
+              </a:spcAft>
+            </a:pPr>
+            <a:r>
+              <a:rPr sz="1500">
+                <a:solidFill>
+                  <a:srgbClr val="22282E"/>
+                </a:solidFill>
+              </a:rPr>
+              <a:t>•  ❓ ¿HIPAA me afecta si no estoy en EE. UU.?</a:t>
+            </a:r>
+          </a:p>
+        </p:txBody>
+      </p:sp>
+    </p:spTree>
+  </p:cSld>
+  <p:clrMapOvr>
+    <a:masterClrMapping/>
+  </p:clrMapOvr>
+</p:sld>
+</file>
+
+<file path=ppt/slides/slide15.xml><?xml version="1.0" encoding="utf-8"?>
+<p:sld xmlns:a="http://schemas.openxmlformats.org/drawingml/2006/main" xmlns:p="http://schemas.openxmlformats.org/presentationml/2006/main" xmlns:r="http://schemas.openxmlformats.org/officeDocument/2006/relationships">
+  <p:cSld>
+    <p:spTree>
+      <p:nvGrpSpPr>
+        <p:cNvPr id="1" name=""/>
+        <p:cNvGrpSpPr/>
+        <p:nvPr/>
+      </p:nvGrpSpPr>
+      <p:grpSpPr/>
+      <p:sp>
+        <p:nvSpPr>
+          <p:cNvPr id="2" name="TextBox 1"/>
+          <p:cNvSpPr txBox="1"/>
+          <p:nvPr/>
+        </p:nvSpPr>
+        <p:spPr>
+          <a:xfrm>
+            <a:off x="457200" y="320040"/>
+            <a:ext cx="8229600" cy="822960"/>
+          </a:xfrm>
+          <a:prstGeom prst="rect">
+            <a:avLst/>
+          </a:prstGeom>
+          <a:noFill/>
+        </p:spPr>
+        <p:txBody>
+          <a:bodyPr wrap="square">
+            <a:spAutoFit/>
+          </a:bodyPr>
+          <a:lstStyle/>
+          <a:p>
+            <a:r>
+              <a:rPr sz="2600" b="1">
+                <a:solidFill>
+                  <a:srgbClr val="0B3D2E"/>
+                </a:solidFill>
+              </a:rPr>
+              <a:t>🔗 Referencias</a:t>
+            </a:r>
+          </a:p>
+        </p:txBody>
+      </p:sp>
+      <p:sp>
+        <p:nvSpPr>
+          <p:cNvPr id="3" name="TextBox 2"/>
+          <p:cNvSpPr txBox="1"/>
+          <p:nvPr/>
+        </p:nvSpPr>
+        <p:spPr>
+          <a:xfrm>
+            <a:off x="457200" y="1280160"/>
+            <a:ext cx="8229600" cy="4937760"/>
+          </a:xfrm>
+          <a:prstGeom prst="rect">
+            <a:avLst/>
+          </a:prstGeom>
+          <a:noFill/>
+        </p:spPr>
+        <p:txBody>
+          <a:bodyPr wrap="square">
+            <a:spAutoFit/>
+          </a:bodyPr>
+          <a:lstStyle/>
+          <a:p>
+            <a:pPr>
+              <a:spcAft>
+                <a:spcPts val="600"/>
+              </a:spcAft>
+            </a:pPr>
+            <a:r>
+              <a:rPr sz="1500">
+                <a:solidFill>
+                  <a:srgbClr val="22282E"/>
+                </a:solidFill>
+              </a:rPr>
               <a:t>•  GDPR — Reglamento (UE) 2016/679. &lt;https://eur-lex.europa.eu/eli/reg/2016/679/oj&gt;</a:t>
             </a:r>
           </a:p>
@@ -3629,6 +4080,81 @@
           </a:p>
         </p:txBody>
       </p:sp>
+    </p:spTree>
+  </p:cSld>
+  <p:clrMapOvr>
+    <a:masterClrMapping/>
+  </p:clrMapOvr>
+</p:sld>
+</file>
+
+<file path=ppt/slides/slide16.xml><?xml version="1.0" encoding="utf-8"?>
+<p:sld xmlns:a="http://schemas.openxmlformats.org/drawingml/2006/main" xmlns:p="http://schemas.openxmlformats.org/presentationml/2006/main" xmlns:r="http://schemas.openxmlformats.org/officeDocument/2006/relationships">
+  <p:cSld>
+    <p:spTree>
+      <p:nvGrpSpPr>
+        <p:cNvPr id="1" name=""/>
+        <p:cNvGrpSpPr/>
+        <p:nvPr/>
+      </p:nvGrpSpPr>
+      <p:grpSpPr/>
+      <p:sp>
+        <p:nvSpPr>
+          <p:cNvPr id="2" name="TextBox 1"/>
+          <p:cNvSpPr txBox="1"/>
+          <p:nvPr/>
+        </p:nvSpPr>
+        <p:spPr>
+          <a:xfrm>
+            <a:off x="457200" y="274320"/>
+            <a:ext cx="8229600" cy="640080"/>
+          </a:xfrm>
+          <a:prstGeom prst="rect">
+            <a:avLst/>
+          </a:prstGeom>
+          <a:noFill/>
+        </p:spPr>
+        <p:txBody>
+          <a:bodyPr wrap="square">
+            <a:spAutoFit/>
+          </a:bodyPr>
+          <a:lstStyle/>
+          <a:p>
+            <a:r>
+              <a:rPr sz="2200" b="1">
+                <a:solidFill>
+                  <a:srgbClr val="0B3D2E"/>
+                </a:solidFill>
+              </a:rPr>
+              <a:t>Diagrama de la clase</a:t>
+            </a:r>
+          </a:p>
+        </p:txBody>
+      </p:sp>
+      <p:pic>
+        <p:nvPicPr>
+          <p:cNvPr id="3" name="Picture 2" descr="7df4771a33f57ace.png"/>
+          <p:cNvPicPr>
+            <a:picLocks noChangeAspect="1"/>
+          </p:cNvPicPr>
+          <p:nvPr/>
+        </p:nvPicPr>
+        <p:blipFill>
+          <a:blip r:embed="rId2"/>
+          <a:stretch>
+            <a:fillRect/>
+          </a:stretch>
+        </p:blipFill>
+        <p:spPr>
+          <a:xfrm>
+            <a:off x="457200" y="3470148"/>
+            <a:ext cx="8229600" cy="557784"/>
+          </a:xfrm>
+          <a:prstGeom prst="rect">
+            <a:avLst/>
+          </a:prstGeom>
+        </p:spPr>
+      </p:pic>
     </p:spTree>
   </p:cSld>
   <p:clrMapOvr>
@@ -3713,7 +4239,7 @@
                   <a:srgbClr val="22282E"/>
                 </a:solidFill>
               </a:rPr>
-              <a:t>•  Comprender las tres regulaciones de cumplimiento más influyentes para la seguridad de la información —GDPR (privacidad europea), HIPAA (salud en EE. UU.) y PCI-DSS (pagos con tarjeta)— e identificar cuáles aplican a un escenario y qué obligaciones concretas imponen. Al terminar sabrás determinar la aplicabilidad, mapear requisitos a controles técnicos y evitar multas y sanciones por incumplimiento.</a:t>
+              <a:t>•  Comprender las tres regulaciones de cumplimiento más influyentes para la seguridad de la información —GDPR (privacidad europea), HIPAA (salud en EE. UU.) y PCI-DSS (pagos con tarjeta)— e identificar…</a:t>
             </a:r>
           </a:p>
         </p:txBody>
@@ -4107,7 +4633,7 @@
                   <a:srgbClr val="0B3D2E"/>
                 </a:solidFill>
               </a:rPr>
-              <a:t>📖 Definiciones y características</a:t>
+              <a:t>🧠 Explicación en profundidad</a:t>
             </a:r>
           </a:p>
         </p:txBody>
@@ -4145,97 +4671,22 @@
                   <a:srgbClr val="22282E"/>
                 </a:solidFill>
               </a:rPr>
-              <a:t>•  GDPR: reglamento europeo de protección de datos personales. Clave: multas hasta 20 M€ o 4% de la facturación global.</a:t>
-            </a:r>
-          </a:p>
-          <a:p>
-            <a:pPr>
-              <a:spcAft>
-                <a:spcPts val="600"/>
-              </a:spcAft>
-            </a:pPr>
-            <a:r>
-              <a:rPr sz="1500">
-                <a:solidFill>
-                  <a:srgbClr val="22282E"/>
-                </a:solidFill>
-              </a:rPr>
-              <a:t>•  Dato personal: cualquier información sobre una persona física identificable. Clave: incluye IP, cookies, identificadores.</a:t>
-            </a:r>
-          </a:p>
-          <a:p>
-            <a:pPr>
-              <a:spcAft>
-                <a:spcPts val="600"/>
-              </a:spcAft>
-            </a:pPr>
-            <a:r>
-              <a:rPr sz="1500">
-                <a:solidFill>
-                  <a:srgbClr val="22282E"/>
-                </a:solidFill>
-              </a:rPr>
-              <a:t>•  Responsable / encargado del tratamiento: quien decide los fines vs. quien procesa por cuenta ajena. Clave: definen las obligaciones contractuales (DPA).</a:t>
-            </a:r>
-          </a:p>
-          <a:p>
-            <a:pPr>
-              <a:spcAft>
-                <a:spcPts val="600"/>
-              </a:spcAft>
-            </a:pPr>
-            <a:r>
-              <a:rPr sz="1500">
-                <a:solidFill>
-                  <a:srgbClr val="22282E"/>
-                </a:solidFill>
-              </a:rPr>
-              <a:t>•  HIPAA / PHI: ley de salud de EE. UU. y su dato protegido (Protected Health Information). Clave: Security Rule exige salvaguardas administrativas, físicas y técnicas.</a:t>
-            </a:r>
-          </a:p>
-          <a:p>
-            <a:pPr>
-              <a:spcAft>
-                <a:spcPts val="600"/>
-              </a:spcAft>
-            </a:pPr>
-            <a:r>
-              <a:rPr sz="1500">
-                <a:solidFill>
-                  <a:srgbClr val="22282E"/>
-                </a:solidFill>
-              </a:rPr>
-              <a:t>•  PCI-DSS: estándar del sector de pagos con 12 requisitos. Clave: obligatorio por contrato con las marcas de tarjeta, no por ley.</a:t>
-            </a:r>
-          </a:p>
-          <a:p>
-            <a:pPr>
-              <a:spcAft>
-                <a:spcPts val="600"/>
-              </a:spcAft>
-            </a:pPr>
-            <a:r>
-              <a:rPr sz="1500">
-                <a:solidFill>
-                  <a:srgbClr val="22282E"/>
-                </a:solidFill>
-              </a:rPr>
-              <a:t>•  CDE (Cardholder Data Environment): entorno donde se almacenan/procesan/transmiten datos de tarjeta. Clave: reducir el CDE reduce el alcance de auditoría.</a:t>
-            </a:r>
-          </a:p>
-          <a:p>
-            <a:pPr>
-              <a:spcAft>
-                <a:spcPts val="600"/>
-              </a:spcAft>
-            </a:pPr>
-            <a:r>
-              <a:rPr sz="1500">
-                <a:solidFill>
-                  <a:srgbClr val="22282E"/>
-                </a:solidFill>
-              </a:rPr>
-              <a:t>•  Tokenización: sustituir el PAN por un token sin valor. Clave: saca sistemas del alcance PCI.</a:t>
+              <a:t>•  GDPR, HIPAA y PCI DSS no son intercambiables: cambian jurisdicción, sujetos, datos, obligaciones y mecanismos de supervisión. El análisis comienza por aplicabilidad y flujo de datos; después mapea…</a:t>
+            </a:r>
+          </a:p>
+          <a:p>
+            <a:pPr>
+              <a:spcAft>
+                <a:spcPts val="600"/>
+              </a:spcAft>
+            </a:pPr>
+            <a:r>
+              <a:rPr sz="1500">
+                <a:solidFill>
+                  <a:srgbClr val="22282E"/>
+                </a:solidFill>
+              </a:rPr>
+              <a:t>•  Una tienda tokeniza tarjetas y reduce alcance PCI, pero conserva perfiles de clientes sin base ni retención. Un control resolvió parte del flujo, no todas las obligaciones.</a:t>
             </a:r>
           </a:p>
         </p:txBody>
@@ -4286,7 +4737,7 @@
                   <a:srgbClr val="0B3D2E"/>
                 </a:solidFill>
               </a:rPr>
-              <a:t>🧰 Herramientas y preparación</a:t>
+              <a:t>📔 Glosario operativo</a:t>
             </a:r>
           </a:p>
         </p:txBody>
@@ -4324,52 +4775,52 @@
                   <a:srgbClr val="22282E"/>
                 </a:solidFill>
               </a:rPr>
-              <a:t>•  Textos oficiales: GDPR en EUR-Lex, HIPAA Security Rule en HHS.gov, PCI DSS v4.0 en el PCI SSC.</a:t>
-            </a:r>
-          </a:p>
-          <a:p>
-            <a:pPr>
-              <a:spcAft>
-                <a:spcPts val="600"/>
-              </a:spcAft>
-            </a:pPr>
-            <a:r>
-              <a:rPr sz="1500">
-                <a:solidFill>
-                  <a:srgbClr val="22282E"/>
-                </a:solidFill>
-              </a:rPr>
-              <a:t>•  Los cuestionarios SAQ (Self-Assessment Questionnaire) de PCI, según tipo de comercio.</a:t>
-            </a:r>
-          </a:p>
-          <a:p>
-            <a:pPr>
-              <a:spcAft>
-                <a:spcPts val="600"/>
-              </a:spcAft>
-            </a:pPr>
-            <a:r>
-              <a:rPr sz="1500">
-                <a:solidFill>
-                  <a:srgbClr val="22282E"/>
-                </a:solidFill>
-              </a:rPr>
-              <a:t>•  Hoja de cálculo para el mapeo requisito → control.</a:t>
-            </a:r>
-          </a:p>
-          <a:p>
-            <a:pPr>
-              <a:spcAft>
-                <a:spcPts val="600"/>
-              </a:spcAft>
-            </a:pPr>
-            <a:r>
-              <a:rPr sz="1500">
-                <a:solidFill>
-                  <a:srgbClr val="22282E"/>
-                </a:solidFill>
-              </a:rPr>
-              <a:t>•  Opcional: un diagrama de flujo de datos (draw.io / Mermaid) para trazar dónde viven los datos personales y de tarjeta.</a:t>
+              <a:t>•  Término — Definición</a:t>
+            </a:r>
+          </a:p>
+          <a:p>
+            <a:pPr>
+              <a:spcAft>
+                <a:spcPts val="600"/>
+              </a:spcAft>
+            </a:pPr>
+            <a:r>
+              <a:rPr sz="1500">
+                <a:solidFill>
+                  <a:srgbClr val="22282E"/>
+                </a:solidFill>
+              </a:rPr>
+              <a:t>•  Aplicabilidad — Razón documentada por la que una norma obliga a una entidad o flujo.</a:t>
+            </a:r>
+          </a:p>
+          <a:p>
+            <a:pPr>
+              <a:spcAft>
+                <a:spcPts val="600"/>
+              </a:spcAft>
+            </a:pPr>
+            <a:r>
+              <a:rPr sz="1500">
+                <a:solidFill>
+                  <a:srgbClr val="22282E"/>
+                </a:solidFill>
+              </a:rPr>
+              <a:t>•  Rol — Posición jurídica u operativa que determina obligaciones.</a:t>
+            </a:r>
+          </a:p>
+          <a:p>
+            <a:pPr>
+              <a:spcAft>
+                <a:spcPts val="600"/>
+              </a:spcAft>
+            </a:pPr>
+            <a:r>
+              <a:rPr sz="1500">
+                <a:solidFill>
+                  <a:srgbClr val="22282E"/>
+                </a:solidFill>
+              </a:rPr>
+              <a:t>•  Alcance — Sistemas, personas y datos cubiertos.</a:t>
             </a:r>
           </a:p>
         </p:txBody>
@@ -4420,7 +4871,7 @@
                   <a:srgbClr val="0B3D2E"/>
                 </a:solidFill>
               </a:rPr>
-              <a:t>🧪 Laboratorio guiado (ejercicio aplicado)</a:t>
+              <a:t>✅ Criterio de dominio</a:t>
             </a:r>
           </a:p>
         </p:txBody>
@@ -4458,97 +4909,7 @@
                   <a:srgbClr val="22282E"/>
                 </a:solidFill>
               </a:rPr>
-              <a:t>•  Escenario: "Ferretería del Sur S.A." vende online a clientes de la UE, guarda perfiles de clientes y procesa pagos con tarjeta a través de una pasarela.</a:t>
-            </a:r>
-          </a:p>
-          <a:p>
-            <a:pPr>
-              <a:spcAft>
-                <a:spcPts val="600"/>
-              </a:spcAft>
-            </a:pPr>
-            <a:r>
-              <a:rPr sz="1500">
-                <a:solidFill>
-                  <a:srgbClr val="22282E"/>
-                </a:solidFill>
-              </a:rPr>
-              <a:t>•  Data flow mapping: dibuja el flujo de datos personales y de tarjeta desde el navegador del cliente hasta la base de datos y la pasarela. Marca dónde se almacena cada tipo.</a:t>
-            </a:r>
-          </a:p>
-          <a:p>
-            <a:pPr>
-              <a:spcAft>
-                <a:spcPts val="600"/>
-              </a:spcAft>
-            </a:pPr>
-            <a:r>
-              <a:rPr sz="1500">
-                <a:solidFill>
-                  <a:srgbClr val="22282E"/>
-                </a:solidFill>
-              </a:rPr>
-              <a:t>•  Aplicabilidad: en una tabla, decide qué regulación aplica a cada flujo. GDPR aplica (clientes UE); PCI-DSS aplica (datos de tarjeta); HIPAA no (no hay datos de salud). Justifica.</a:t>
-            </a:r>
-          </a:p>
-          <a:p>
-            <a:pPr>
-              <a:spcAft>
-                <a:spcPts val="600"/>
-              </a:spcAft>
-            </a:pPr>
-            <a:r>
-              <a:rPr sz="1500">
-                <a:solidFill>
-                  <a:srgbClr val="22282E"/>
-                </a:solidFill>
-              </a:rPr>
-              <a:t>•  GDPR: identifica la base de licitud de cada tratamiento (ejecución de contrato para la compra, consentimiento para marketing) y lista 3 derechos que debes poder atender (acceso, supresión, portabilidad).</a:t>
-            </a:r>
-          </a:p>
-          <a:p>
-            <a:pPr>
-              <a:spcAft>
-                <a:spcPts val="600"/>
-              </a:spcAft>
-            </a:pPr>
-            <a:r>
-              <a:rPr sz="1500">
-                <a:solidFill>
-                  <a:srgbClr val="22282E"/>
-                </a:solidFill>
-              </a:rPr>
-              <a:t>•  Reducción de alcance PCI: propón usar la pasarela con hosted fields o tokenización para que el PAN nunca toque tus servidores; explica cómo eso reduce el SAQ aplicable (de D a A).</a:t>
-            </a:r>
-          </a:p>
-          <a:p>
-            <a:pPr>
-              <a:spcAft>
-                <a:spcPts val="600"/>
-              </a:spcAft>
-            </a:pPr>
-            <a:r>
-              <a:rPr sz="1500">
-                <a:solidFill>
-                  <a:srgbClr val="22282E"/>
-                </a:solidFill>
-              </a:rPr>
-              <a:t>•  Mapeo a controles: crea una tabla requisito → control técnico, p. ej.: PCI Req.3 (proteger datos almacenados) → cifrado + tokenización; PCI Req.8 (identificar y autenticar) → MFA; GDPR Art.32 → cifrado y seudonimización.</a:t>
-            </a:r>
-          </a:p>
-          <a:p>
-            <a:pPr>
-              <a:spcAft>
-                <a:spcPts val="600"/>
-              </a:spcAft>
-            </a:pPr>
-            <a:r>
-              <a:rPr sz="1500">
-                <a:solidFill>
-                  <a:srgbClr val="22282E"/>
-                </a:solidFill>
-              </a:rPr>
-              <a:t>•  Notificación de brechas: redacta el procedimiento con plazos: GDPR 72 h a la autoridad de control; PCI, notificación inmediata al adquirente; documenta a quién avisa cada uno.</a:t>
+              <a:t>•  El alumno determina aplicabilidad por caso, evita asesoría jurídica universal y vincula obligación, control y evidencia.</a:t>
             </a:r>
           </a:p>
         </p:txBody>
@@ -4599,7 +4960,7 @@
                   <a:srgbClr val="0B3D2E"/>
                 </a:solidFill>
               </a:rPr>
-              <a:t>✍️ Ejercicios</a:t>
+              <a:t>📖 Definiciones y características</a:t>
             </a:r>
           </a:p>
         </p:txBody>
@@ -4637,82 +4998,97 @@
                   <a:srgbClr val="22282E"/>
                 </a:solidFill>
               </a:rPr>
-              <a:t>•  Clasifica: ¿aplica GDPR a una empresa de EE. UU. que vende a clientes en España? Justifica.</a:t>
-            </a:r>
-          </a:p>
-          <a:p>
-            <a:pPr>
-              <a:spcAft>
-                <a:spcPts val="600"/>
-              </a:spcAft>
-            </a:pPr>
-            <a:r>
-              <a:rPr sz="1500">
-                <a:solidFill>
-                  <a:srgbClr val="22282E"/>
-                </a:solidFill>
-              </a:rPr>
-              <a:t>•  Diferencia responsable y encargado con un ejemplo del escenario.</a:t>
-            </a:r>
-          </a:p>
-          <a:p>
-            <a:pPr>
-              <a:spcAft>
-                <a:spcPts val="600"/>
-              </a:spcAft>
-            </a:pPr>
-            <a:r>
-              <a:rPr sz="1500">
-                <a:solidFill>
-                  <a:srgbClr val="22282E"/>
-                </a:solidFill>
-              </a:rPr>
-              <a:t>•  ¿Qué SAQ aplica si tercerizas todo el pago con hosted fields? ¿Y si almacenas el PAN?</a:t>
-            </a:r>
-          </a:p>
-          <a:p>
-            <a:pPr>
-              <a:spcAft>
-                <a:spcPts val="600"/>
-              </a:spcAft>
-            </a:pPr>
-            <a:r>
-              <a:rPr sz="1500">
-                <a:solidFill>
-                  <a:srgbClr val="22282E"/>
-                </a:solidFill>
-              </a:rPr>
-              <a:t>•  Enumera las tres categorías de salvaguardas de la HIPAA Security Rule.</a:t>
-            </a:r>
-          </a:p>
-          <a:p>
-            <a:pPr>
-              <a:spcAft>
-                <a:spcPts val="600"/>
-              </a:spcAft>
-            </a:pPr>
-            <a:r>
-              <a:rPr sz="1500">
-                <a:solidFill>
-                  <a:srgbClr val="22282E"/>
-                </a:solidFill>
-              </a:rPr>
-              <a:t>•  Un cliente pide borrar sus datos, pero tienes obligación fiscal de conservar facturas 6 años. ¿Cómo lo resuelves?</a:t>
-            </a:r>
-          </a:p>
-          <a:p>
-            <a:pPr>
-              <a:spcAft>
-                <a:spcPts val="600"/>
-              </a:spcAft>
-            </a:pPr>
-            <a:r>
-              <a:rPr sz="1500">
-                <a:solidFill>
-                  <a:srgbClr val="22282E"/>
-                </a:solidFill>
-              </a:rPr>
-              <a:t>•  Mapea el requisito PCI de segmentación de red a un control técnico concreto.</a:t>
+              <a:t>•  GDPR: reglamento europeo de protección de datos personales. Clave: multas hasta 20 M€ o 4% de la facturación global.</a:t>
+            </a:r>
+          </a:p>
+          <a:p>
+            <a:pPr>
+              <a:spcAft>
+                <a:spcPts val="600"/>
+              </a:spcAft>
+            </a:pPr>
+            <a:r>
+              <a:rPr sz="1500">
+                <a:solidFill>
+                  <a:srgbClr val="22282E"/>
+                </a:solidFill>
+              </a:rPr>
+              <a:t>•  Dato personal: cualquier información sobre una persona física identificable. Clave: incluye IP, cookies, identificadores.</a:t>
+            </a:r>
+          </a:p>
+          <a:p>
+            <a:pPr>
+              <a:spcAft>
+                <a:spcPts val="600"/>
+              </a:spcAft>
+            </a:pPr>
+            <a:r>
+              <a:rPr sz="1500">
+                <a:solidFill>
+                  <a:srgbClr val="22282E"/>
+                </a:solidFill>
+              </a:rPr>
+              <a:t>•  Responsable / encargado del tratamiento: quien decide los fines vs. quien procesa por cuenta ajena. Clave: definen las obligaciones contractuales (DPA).</a:t>
+            </a:r>
+          </a:p>
+          <a:p>
+            <a:pPr>
+              <a:spcAft>
+                <a:spcPts val="600"/>
+              </a:spcAft>
+            </a:pPr>
+            <a:r>
+              <a:rPr sz="1500">
+                <a:solidFill>
+                  <a:srgbClr val="22282E"/>
+                </a:solidFill>
+              </a:rPr>
+              <a:t>•  HIPAA / PHI: ley de salud de EE. UU. y su dato protegido (Protected Health Information). Clave: Security Rule exige salvaguardas administrativas, físicas y técnicas.</a:t>
+            </a:r>
+          </a:p>
+          <a:p>
+            <a:pPr>
+              <a:spcAft>
+                <a:spcPts val="600"/>
+              </a:spcAft>
+            </a:pPr>
+            <a:r>
+              <a:rPr sz="1500">
+                <a:solidFill>
+                  <a:srgbClr val="22282E"/>
+                </a:solidFill>
+              </a:rPr>
+              <a:t>•  PCI-DSS: estándar del sector de pagos con 12 requisitos. Clave: obligatorio por contrato con las marcas de tarjeta, no por ley.</a:t>
+            </a:r>
+          </a:p>
+          <a:p>
+            <a:pPr>
+              <a:spcAft>
+                <a:spcPts val="600"/>
+              </a:spcAft>
+            </a:pPr>
+            <a:r>
+              <a:rPr sz="1500">
+                <a:solidFill>
+                  <a:srgbClr val="22282E"/>
+                </a:solidFill>
+              </a:rPr>
+              <a:t>•  CDE (Cardholder Data Environment): entorno donde se almacenan/procesan/transmiten datos de tarjeta. Clave: reducir el CDE reduce el alcance de auditoría.</a:t>
+            </a:r>
+          </a:p>
+          <a:p>
+            <a:pPr>
+              <a:spcAft>
+                <a:spcPts val="600"/>
+              </a:spcAft>
+            </a:pPr>
+            <a:r>
+              <a:rPr sz="1500">
+                <a:solidFill>
+                  <a:srgbClr val="22282E"/>
+                </a:solidFill>
+              </a:rPr>
+              <a:t>•  Tokenización: sustituir el PAN por un token sin valor. Clave: saca sistemas del alcance PCI.</a:t>
             </a:r>
           </a:p>
         </p:txBody>
@@ -4763,7 +5139,7 @@
                   <a:srgbClr val="0B3D2E"/>
                 </a:solidFill>
               </a:rPr>
-              <a:t>📝 Reto verificable</a:t>
+              <a:t>🧰 Herramientas y preparación</a:t>
             </a:r>
           </a:p>
         </p:txBody>
@@ -4801,22 +5177,52 @@
                   <a:srgbClr val="22282E"/>
                 </a:solidFill>
               </a:rPr>
-              <a:t>•  Entrega un análisis de aplicabilidad regulatoria del escenario con: mapa de flujo de datos, tabla de qué regulación aplica y por qué, mapeo de al menos 8 requisitos a controles técnicos, y el procedimiento de notificación de brechas con plazos por marco.</a:t>
-            </a:r>
-          </a:p>
-          <a:p>
-            <a:pPr>
-              <a:spcAft>
-                <a:spcPts val="600"/>
-              </a:spcAft>
-            </a:pPr>
-            <a:r>
-              <a:rPr sz="1500">
-                <a:solidFill>
-                  <a:srgbClr val="22282E"/>
-                </a:solidFill>
-              </a:rPr>
-              <a:t>•  Criterio de aceptación: cada regulación se declara aplicable o no con justificación, el mapeo requisito→control es verificable, y los plazos de notificación (72 h GDPR incluido) son correctos.</a:t>
+              <a:t>•  Textos oficiales: GDPR en EUR-Lex, HIPAA Security Rule en HHS.gov, PCI DSS v4.0 en el PCI SSC.</a:t>
+            </a:r>
+          </a:p>
+          <a:p>
+            <a:pPr>
+              <a:spcAft>
+                <a:spcPts val="600"/>
+              </a:spcAft>
+            </a:pPr>
+            <a:r>
+              <a:rPr sz="1500">
+                <a:solidFill>
+                  <a:srgbClr val="22282E"/>
+                </a:solidFill>
+              </a:rPr>
+              <a:t>•  Los cuestionarios SAQ (Self-Assessment Questionnaire) de PCI, según tipo de comercio.</a:t>
+            </a:r>
+          </a:p>
+          <a:p>
+            <a:pPr>
+              <a:spcAft>
+                <a:spcPts val="600"/>
+              </a:spcAft>
+            </a:pPr>
+            <a:r>
+              <a:rPr sz="1500">
+                <a:solidFill>
+                  <a:srgbClr val="22282E"/>
+                </a:solidFill>
+              </a:rPr>
+              <a:t>•  Hoja de cálculo para el mapeo requisito → control.</a:t>
+            </a:r>
+          </a:p>
+          <a:p>
+            <a:pPr>
+              <a:spcAft>
+                <a:spcPts val="600"/>
+              </a:spcAft>
+            </a:pPr>
+            <a:r>
+              <a:rPr sz="1500">
+                <a:solidFill>
+                  <a:srgbClr val="22282E"/>
+                </a:solidFill>
+              </a:rPr>
+              <a:t>•  Opcional: un diagrama de flujo de datos (draw.io / Mermaid) para trazar dónde viven los datos personales y de tarjeta.</a:t>
             </a:r>
           </a:p>
         </p:txBody>
